--- a/master-plan/master-plan.pptx
+++ b/master-plan/master-plan.pptx
@@ -118,19 +118,19 @@
   <p:extLst>
     <p:ext uri="{521415D9-36F7-43E2-AB2F-B90AF26B5E84}">
       <p14:sectionLst xmlns:p14="http://schemas.microsoft.com/office/powerpoint/2010/main">
-        <p14:section name="Opening" id="{aafa1ebf-9692-b682-1700-f5ffaa206ddc}">
+        <p14:section name="Opening" id="{9944ad3f-dc08-7ef9-cdc8-c54328facb29}">
           <p14:sldIdLst>
             <p14:sldId id="256"/>
             <p14:sldId id="257"/>
           </p14:sldIdLst>
         </p14:section>
-        <p14:section name="Where we are" id="{c2bb17c1-8cc5-4c24-17a4-0e747b6c5995}">
+        <p14:section name="Where we are" id="{e00cc6ef-f542-2f53-8bcf-4601016348ff}">
           <p14:sldIdLst>
             <p14:sldId id="258"/>
             <p14:sldId id="259"/>
           </p14:sldIdLst>
         </p14:section>
-        <p14:section name="The plan" id="{6dd9fd7c-22b7-b160-a4a2-0cc75c8357bf}">
+        <p14:section name="The plan" id="{f5a9724e-3850-f7f2-c476-5f6bb12efac3}">
           <p14:sldIdLst>
             <p14:sldId id="260"/>
             <p14:sldId id="261"/>
@@ -139,7 +139,7 @@
             <p14:sldId id="264"/>
           </p14:sldIdLst>
         </p14:section>
-        <p14:section name="The road ahead" id="{d7510521-3842-c7a7-7bf9-2a12582e7706}">
+        <p14:section name="The road ahead" id="{ab52198f-94f4-703f-fabc-3410de8a6d93}">
           <p14:sldIdLst>
             <p14:sldId id="265"/>
             <p14:sldId id="266"/>
@@ -2089,46 +2089,7 @@
       </p:pic>
       <p:sp>
         <p:nvSpPr>
-          <p:cNvPr id="5" name="Photo slot label 01-cover"/>
-          <p:cNvSpPr txBox="1"/>
-          <p:nvPr/>
-        </p:nvSpPr>
-        <p:spPr>
-          <a:xfrm>
-            <a:off x="6080760" y="274320"/>
-            <a:ext cx="5882335" cy="548640"/>
-          </a:xfrm>
-          <a:prstGeom prst="rect">
-            <a:avLst/>
-          </a:prstGeom>
-          <a:noFill/>
-          <a:ln/>
-        </p:spPr>
-        <p:txBody>
-          <a:bodyPr wrap="square" lIns="0" tIns="0" rIns="0" bIns="0" rtlCol="0" anchor="t"/>
-          <a:lstStyle/>
-          <a:p>
-            <a:pPr algn="r" indent="0" marL="0">
-              <a:buNone/>
-            </a:pPr>
-            <a:r>
-              <a:rPr lang="en-US" sz="900" spc="150" kern="0" dirty="0">
-                <a:solidFill>
-                  <a:schemeClr val="accent1"/>
-                </a:solidFill>
-                <a:latin typeface="+mn-lt" pitchFamily="34" charset="0"/>
-                <a:ea typeface="+mn-lt" pitchFamily="34" charset="-122"/>
-                <a:cs typeface="+mn-lt" pitchFamily="34" charset="-120"/>
-              </a:rPr>
-              <a:t>PHOTO SLOT 01-COVER : ROASTED BEANS TUMBLING FROM A DRUM ROASTER</a:t>
-            </a:r>
-            <a:endParaRPr lang="en-US" sz="900" dirty="0"/>
-          </a:p>
-        </p:txBody>
-      </p:sp>
-      <p:sp>
-        <p:nvSpPr>
-          <p:cNvPr id="6" name="Eyebrow: Strategy alignment · Al Shami"/>
+          <p:cNvPr id="5" name="Eyebrow: Strategy alignment · Al Shami"/>
           <p:cNvSpPr txBox="1"/>
           <p:nvPr/>
         </p:nvSpPr>
@@ -2167,7 +2128,7 @@
       </p:sp>
       <p:sp>
         <p:nvSpPr>
-          <p:cNvPr id="7" name="Cover title"/>
+          <p:cNvPr id="6" name="Cover title"/>
           <p:cNvSpPr txBox="1"/>
           <p:nvPr/>
         </p:nvSpPr>
@@ -2206,7 +2167,7 @@
       </p:sp>
       <p:sp>
         <p:nvSpPr>
-          <p:cNvPr id="8" name="Cover subtitle"/>
+          <p:cNvPr id="7" name="Cover subtitle"/>
           <p:cNvSpPr txBox="1"/>
           <p:nvPr/>
         </p:nvSpPr>
@@ -2248,7 +2209,7 @@
       </p:sp>
       <p:sp>
         <p:nvSpPr>
-          <p:cNvPr id="9" name="Cover meta"/>
+          <p:cNvPr id="8" name="Cover meta"/>
           <p:cNvSpPr txBox="1"/>
           <p:nvPr/>
         </p:nvSpPr>
@@ -4030,46 +3991,7 @@
       </p:pic>
       <p:sp>
         <p:nvSpPr>
-          <p:cNvPr id="4" name="Photo slot label 12-close"/>
-          <p:cNvSpPr txBox="1"/>
-          <p:nvPr/>
-        </p:nvSpPr>
-        <p:spPr>
-          <a:xfrm>
-            <a:off x="228600" y="274320"/>
-            <a:ext cx="11734495" cy="548640"/>
-          </a:xfrm>
-          <a:prstGeom prst="rect">
-            <a:avLst/>
-          </a:prstGeom>
-          <a:noFill/>
-          <a:ln/>
-        </p:spPr>
-        <p:txBody>
-          <a:bodyPr wrap="square" lIns="0" tIns="0" rIns="0" bIns="0" rtlCol="0" anchor="t"/>
-          <a:lstStyle/>
-          <a:p>
-            <a:pPr algn="r" indent="0" marL="0">
-              <a:buNone/>
-            </a:pPr>
-            <a:r>
-              <a:rPr lang="en-US" sz="900" spc="150" kern="0" dirty="0">
-                <a:solidFill>
-                  <a:schemeClr val="accent4"/>
-                </a:solidFill>
-                <a:latin typeface="+mn-lt" pitchFamily="34" charset="0"/>
-                <a:ea typeface="+mn-lt" pitchFamily="34" charset="-122"/>
-                <a:cs typeface="+mn-lt" pitchFamily="34" charset="-120"/>
-              </a:rPr>
-              <a:t>PHOTO SLOT 12-CLOSE : STEAM RISING FROM A COFFEE CUP</a:t>
-            </a:r>
-            <a:endParaRPr lang="en-US" sz="900" dirty="0"/>
-          </a:p>
-        </p:txBody>
-      </p:sp>
-      <p:sp>
-        <p:nvSpPr>
-          <p:cNvPr id="5" name="Eyebrow: Thank you"/>
+          <p:cNvPr id="4" name="Eyebrow: Thank you"/>
           <p:cNvSpPr txBox="1"/>
           <p:nvPr/>
         </p:nvSpPr>
@@ -4108,7 +4030,7 @@
       </p:sp>
       <p:sp>
         <p:nvSpPr>
-          <p:cNvPr id="6" name="Statement"/>
+          <p:cNvPr id="5" name="Statement"/>
           <p:cNvSpPr txBox="1"/>
           <p:nvPr/>
         </p:nvSpPr>
@@ -4150,7 +4072,7 @@
       </p:sp>
       <p:sp>
         <p:nvSpPr>
-          <p:cNvPr id="7" name="Contact"/>
+          <p:cNvPr id="6" name="Contact"/>
           <p:cNvSpPr txBox="1"/>
           <p:nvPr/>
         </p:nvSpPr>
@@ -5659,46 +5581,7 @@
       </p:pic>
       <p:sp>
         <p:nvSpPr>
-          <p:cNvPr id="4" name="Photo slot label 04-ambition"/>
-          <p:cNvSpPr txBox="1"/>
-          <p:nvPr/>
-        </p:nvSpPr>
-        <p:spPr>
-          <a:xfrm>
-            <a:off x="228600" y="274320"/>
-            <a:ext cx="11734495" cy="548640"/>
-          </a:xfrm>
-          <a:prstGeom prst="rect">
-            <a:avLst/>
-          </a:prstGeom>
-          <a:noFill/>
-          <a:ln/>
-        </p:spPr>
-        <p:txBody>
-          <a:bodyPr wrap="square" lIns="0" tIns="0" rIns="0" bIns="0" rtlCol="0" anchor="t"/>
-          <a:lstStyle/>
-          <a:p>
-            <a:pPr algn="r" indent="0" marL="0">
-              <a:buNone/>
-            </a:pPr>
-            <a:r>
-              <a:rPr lang="en-US" sz="900" spc="150" kern="0" dirty="0">
-                <a:solidFill>
-                  <a:schemeClr val="accent4"/>
-                </a:solidFill>
-                <a:latin typeface="+mn-lt" pitchFamily="34" charset="0"/>
-                <a:ea typeface="+mn-lt" pitchFamily="34" charset="-122"/>
-                <a:cs typeface="+mn-lt" pitchFamily="34" charset="-120"/>
-              </a:rPr>
-              <a:t>PHOTO SLOT 04-AMBITION : ARABIC COFFEE POURED FROM A BRASS DALLAH</a:t>
-            </a:r>
-            <a:endParaRPr lang="en-US" sz="900" dirty="0"/>
-          </a:p>
-        </p:txBody>
-      </p:sp>
-      <p:sp>
-        <p:nvSpPr>
-          <p:cNvPr id="5" name="Eyebrow: The ambition"/>
+          <p:cNvPr id="4" name="Eyebrow: The ambition"/>
           <p:cNvSpPr txBox="1"/>
           <p:nvPr/>
         </p:nvSpPr>
@@ -5737,7 +5620,7 @@
       </p:sp>
       <p:sp>
         <p:nvSpPr>
-          <p:cNvPr id="6" name="Statement"/>
+          <p:cNvPr id="5" name="Statement"/>
           <p:cNvSpPr txBox="1"/>
           <p:nvPr/>
         </p:nvSpPr>
@@ -5779,7 +5662,7 @@
       </p:sp>
       <p:sp>
         <p:nvSpPr>
-          <p:cNvPr id="7" name="Statement sub"/>
+          <p:cNvPr id="6" name="Statement sub"/>
           <p:cNvSpPr txBox="1"/>
           <p:nvPr/>
         </p:nvSpPr>
@@ -5821,7 +5704,7 @@
       </p:sp>
       <p:sp>
         <p:nvSpPr>
-          <p:cNvPr id="8" name="Footer"/>
+          <p:cNvPr id="7" name="Footer"/>
           <p:cNvSpPr txBox="1"/>
           <p:nvPr/>
         </p:nvSpPr>
@@ -6010,46 +5893,7 @@
       </p:pic>
       <p:sp>
         <p:nvSpPr>
-          <p:cNvPr id="6" name="Photo slot label 05-card-1"/>
-          <p:cNvSpPr txBox="1"/>
-          <p:nvPr/>
-        </p:nvSpPr>
-        <p:spPr>
-          <a:xfrm>
-            <a:off x="1051560" y="2331720"/>
-            <a:ext cx="1950872" cy="548640"/>
-          </a:xfrm>
-          <a:prstGeom prst="rect">
-            <a:avLst/>
-          </a:prstGeom>
-          <a:noFill/>
-          <a:ln/>
-        </p:spPr>
-        <p:txBody>
-          <a:bodyPr wrap="square" lIns="0" tIns="0" rIns="0" bIns="0" rtlCol="0" anchor="t"/>
-          <a:lstStyle/>
-          <a:p>
-            <a:pPr algn="r" indent="0" marL="0">
-              <a:buNone/>
-            </a:pPr>
-            <a:r>
-              <a:rPr lang="en-US" sz="900" spc="150" kern="0" dirty="0">
-                <a:solidFill>
-                  <a:schemeClr val="accent1"/>
-                </a:solidFill>
-                <a:latin typeface="+mn-lt" pitchFamily="34" charset="0"/>
-                <a:ea typeface="+mn-lt" pitchFamily="34" charset="-122"/>
-                <a:cs typeface="+mn-lt" pitchFamily="34" charset="-120"/>
-              </a:rPr>
-              <a:t>PHOTO SLOT 05-CARD-1 : GRAB AND GO COUNTER</a:t>
-            </a:r>
-            <a:endParaRPr lang="en-US" sz="900" dirty="0"/>
-          </a:p>
-        </p:txBody>
-      </p:sp>
-      <p:sp>
-        <p:nvSpPr>
-          <p:cNvPr id="7" name="Pillar number 01"/>
+          <p:cNvPr id="6" name="Pillar number 01"/>
           <p:cNvSpPr txBox="1"/>
           <p:nvPr/>
         </p:nvSpPr>
@@ -6088,7 +5932,7 @@
       </p:sp>
       <p:sp>
         <p:nvSpPr>
-          <p:cNvPr id="8" name="Pillar panel 01"/>
+          <p:cNvPr id="7" name="Pillar panel 01"/>
           <p:cNvSpPr/>
           <p:nvPr/>
         </p:nvSpPr>
@@ -6113,7 +5957,7 @@
       </p:sp>
       <p:sp>
         <p:nvSpPr>
-          <p:cNvPr id="9" name="Pillar title 01"/>
+          <p:cNvPr id="8" name="Pillar title 01"/>
           <p:cNvSpPr txBox="1"/>
           <p:nvPr/>
         </p:nvSpPr>
@@ -6155,7 +5999,7 @@
       </p:sp>
       <p:sp>
         <p:nvSpPr>
-          <p:cNvPr id="10" name="Pillar description 01"/>
+          <p:cNvPr id="9" name="Pillar description 01"/>
           <p:cNvSpPr txBox="1"/>
           <p:nvPr/>
         </p:nvSpPr>
@@ -6197,7 +6041,7 @@
       </p:sp>
       <p:pic>
         <p:nvPicPr>
-          <p:cNvPr id="11" name="Photo 05-card-2" descr="Chef plating in an open kitchen">    </p:cNvPr>
+          <p:cNvPr id="10" name="Photo 05-card-2" descr="Chef plating in an open kitchen">    </p:cNvPr>
           <p:cNvPicPr>
             <a:picLocks noChangeAspect="1"/>
           </p:cNvPicPr>
@@ -6220,7 +6064,7 @@
       </p:pic>
       <p:pic>
         <p:nvPicPr>
-          <p:cNvPr id="12" name="Scrim scrim_bottom" descr="Gradient scrim">    </p:cNvPr>
+          <p:cNvPr id="11" name="Scrim scrim_bottom" descr="Gradient scrim">    </p:cNvPr>
           <p:cNvPicPr>
             <a:picLocks noChangeAspect="1"/>
           </p:cNvPicPr>
@@ -6244,46 +6088,7 @@
       </p:pic>
       <p:sp>
         <p:nvSpPr>
-          <p:cNvPr id="13" name="Photo slot label 05-card-2"/>
-          <p:cNvSpPr txBox="1"/>
-          <p:nvPr/>
-        </p:nvSpPr>
-        <p:spPr>
-          <a:xfrm>
-            <a:off x="3764128" y="2331720"/>
-            <a:ext cx="1950872" cy="548640"/>
-          </a:xfrm>
-          <a:prstGeom prst="rect">
-            <a:avLst/>
-          </a:prstGeom>
-          <a:noFill/>
-          <a:ln/>
-        </p:spPr>
-        <p:txBody>
-          <a:bodyPr wrap="square" lIns="0" tIns="0" rIns="0" bIns="0" rtlCol="0" anchor="t"/>
-          <a:lstStyle/>
-          <a:p>
-            <a:pPr algn="r" indent="0" marL="0">
-              <a:buNone/>
-            </a:pPr>
-            <a:r>
-              <a:rPr lang="en-US" sz="900" spc="150" kern="0" dirty="0">
-                <a:solidFill>
-                  <a:schemeClr val="accent1"/>
-                </a:solidFill>
-                <a:latin typeface="+mn-lt" pitchFamily="34" charset="0"/>
-                <a:ea typeface="+mn-lt" pitchFamily="34" charset="-122"/>
-                <a:cs typeface="+mn-lt" pitchFamily="34" charset="-120"/>
-              </a:rPr>
-              <a:t>PHOTO SLOT 05-CARD-2 : CHEF PLATING IN AN OPEN KITCHEN</a:t>
-            </a:r>
-            <a:endParaRPr lang="en-US" sz="900" dirty="0"/>
-          </a:p>
-        </p:txBody>
-      </p:sp>
-      <p:sp>
-        <p:nvSpPr>
-          <p:cNvPr id="14" name="Pillar number 02"/>
+          <p:cNvPr id="12" name="Pillar number 02"/>
           <p:cNvSpPr txBox="1"/>
           <p:nvPr/>
         </p:nvSpPr>
@@ -6322,7 +6127,7 @@
       </p:sp>
       <p:sp>
         <p:nvSpPr>
-          <p:cNvPr id="15" name="Pillar panel 02"/>
+          <p:cNvPr id="13" name="Pillar panel 02"/>
           <p:cNvSpPr/>
           <p:nvPr/>
         </p:nvSpPr>
@@ -6347,7 +6152,7 @@
       </p:sp>
       <p:sp>
         <p:nvSpPr>
-          <p:cNvPr id="16" name="Pillar title 02"/>
+          <p:cNvPr id="14" name="Pillar title 02"/>
           <p:cNvSpPr txBox="1"/>
           <p:nvPr/>
         </p:nvSpPr>
@@ -6389,7 +6194,7 @@
       </p:sp>
       <p:sp>
         <p:nvSpPr>
-          <p:cNvPr id="17" name="Pillar description 02"/>
+          <p:cNvPr id="15" name="Pillar description 02"/>
           <p:cNvSpPr txBox="1"/>
           <p:nvPr/>
         </p:nvSpPr>
@@ -6431,7 +6236,7 @@
       </p:sp>
       <p:pic>
         <p:nvPicPr>
-          <p:cNvPr id="18" name="Photo 05-card-3" descr="Resort terrace at sunset">    </p:cNvPr>
+          <p:cNvPr id="16" name="Photo 05-card-3" descr="Resort terrace at sunset">    </p:cNvPr>
           <p:cNvPicPr>
             <a:picLocks noChangeAspect="1"/>
           </p:cNvPicPr>
@@ -6454,7 +6259,7 @@
       </p:pic>
       <p:pic>
         <p:nvPicPr>
-          <p:cNvPr id="19" name="Scrim scrim_bottom" descr="Gradient scrim">    </p:cNvPr>
+          <p:cNvPr id="17" name="Scrim scrim_bottom" descr="Gradient scrim">    </p:cNvPr>
           <p:cNvPicPr>
             <a:picLocks noChangeAspect="1"/>
           </p:cNvPicPr>
@@ -6478,46 +6283,7 @@
       </p:pic>
       <p:sp>
         <p:nvSpPr>
-          <p:cNvPr id="20" name="Photo slot label 05-card-3"/>
-          <p:cNvSpPr txBox="1"/>
-          <p:nvPr/>
-        </p:nvSpPr>
-        <p:spPr>
-          <a:xfrm>
-            <a:off x="6476695" y="2331720"/>
-            <a:ext cx="1950872" cy="548640"/>
-          </a:xfrm>
-          <a:prstGeom prst="rect">
-            <a:avLst/>
-          </a:prstGeom>
-          <a:noFill/>
-          <a:ln/>
-        </p:spPr>
-        <p:txBody>
-          <a:bodyPr wrap="square" lIns="0" tIns="0" rIns="0" bIns="0" rtlCol="0" anchor="t"/>
-          <a:lstStyle/>
-          <a:p>
-            <a:pPr algn="r" indent="0" marL="0">
-              <a:buNone/>
-            </a:pPr>
-            <a:r>
-              <a:rPr lang="en-US" sz="900" spc="150" kern="0" dirty="0">
-                <a:solidFill>
-                  <a:schemeClr val="accent1"/>
-                </a:solidFill>
-                <a:latin typeface="+mn-lt" pitchFamily="34" charset="0"/>
-                <a:ea typeface="+mn-lt" pitchFamily="34" charset="-122"/>
-                <a:cs typeface="+mn-lt" pitchFamily="34" charset="-120"/>
-              </a:rPr>
-              <a:t>PHOTO SLOT 05-CARD-3 : RESORT TERRACE AT SUNSET</a:t>
-            </a:r>
-            <a:endParaRPr lang="en-US" sz="900" dirty="0"/>
-          </a:p>
-        </p:txBody>
-      </p:sp>
-      <p:sp>
-        <p:nvSpPr>
-          <p:cNvPr id="21" name="Pillar number 03"/>
+          <p:cNvPr id="18" name="Pillar number 03"/>
           <p:cNvSpPr txBox="1"/>
           <p:nvPr/>
         </p:nvSpPr>
@@ -6556,7 +6322,7 @@
       </p:sp>
       <p:sp>
         <p:nvSpPr>
-          <p:cNvPr id="22" name="Pillar panel 03"/>
+          <p:cNvPr id="19" name="Pillar panel 03"/>
           <p:cNvSpPr/>
           <p:nvPr/>
         </p:nvSpPr>
@@ -6581,7 +6347,7 @@
       </p:sp>
       <p:sp>
         <p:nvSpPr>
-          <p:cNvPr id="23" name="Pillar title 03"/>
+          <p:cNvPr id="20" name="Pillar title 03"/>
           <p:cNvSpPr txBox="1"/>
           <p:nvPr/>
         </p:nvSpPr>
@@ -6623,7 +6389,7 @@
       </p:sp>
       <p:sp>
         <p:nvSpPr>
-          <p:cNvPr id="24" name="Pillar description 03"/>
+          <p:cNvPr id="21" name="Pillar description 03"/>
           <p:cNvSpPr txBox="1"/>
           <p:nvPr/>
         </p:nvSpPr>
@@ -6665,7 +6431,7 @@
       </p:sp>
       <p:pic>
         <p:nvPicPr>
-          <p:cNvPr id="25" name="Photo 05-card-4" descr="Hands holding a small cup of cardamom coffee">    </p:cNvPr>
+          <p:cNvPr id="22" name="Photo 05-card-4" descr="Hands holding a small cup of cardamom coffee">    </p:cNvPr>
           <p:cNvPicPr>
             <a:picLocks noChangeAspect="1"/>
           </p:cNvPicPr>
@@ -6688,7 +6454,7 @@
       </p:pic>
       <p:pic>
         <p:nvPicPr>
-          <p:cNvPr id="26" name="Scrim scrim_bottom" descr="Gradient scrim">    </p:cNvPr>
+          <p:cNvPr id="23" name="Scrim scrim_bottom" descr="Gradient scrim">    </p:cNvPr>
           <p:cNvPicPr>
             <a:picLocks noChangeAspect="1"/>
           </p:cNvPicPr>
@@ -6712,46 +6478,7 @@
       </p:pic>
       <p:sp>
         <p:nvSpPr>
-          <p:cNvPr id="27" name="Photo slot label 05-card-4"/>
-          <p:cNvSpPr txBox="1"/>
-          <p:nvPr/>
-        </p:nvSpPr>
-        <p:spPr>
-          <a:xfrm>
-            <a:off x="9189263" y="2331720"/>
-            <a:ext cx="1950872" cy="548640"/>
-          </a:xfrm>
-          <a:prstGeom prst="rect">
-            <a:avLst/>
-          </a:prstGeom>
-          <a:noFill/>
-          <a:ln/>
-        </p:spPr>
-        <p:txBody>
-          <a:bodyPr wrap="square" lIns="0" tIns="0" rIns="0" bIns="0" rtlCol="0" anchor="t"/>
-          <a:lstStyle/>
-          <a:p>
-            <a:pPr algn="r" indent="0" marL="0">
-              <a:buNone/>
-            </a:pPr>
-            <a:r>
-              <a:rPr lang="en-US" sz="900" spc="150" kern="0" dirty="0">
-                <a:solidFill>
-                  <a:schemeClr val="accent1"/>
-                </a:solidFill>
-                <a:latin typeface="+mn-lt" pitchFamily="34" charset="0"/>
-                <a:ea typeface="+mn-lt" pitchFamily="34" charset="-122"/>
-                <a:cs typeface="+mn-lt" pitchFamily="34" charset="-120"/>
-              </a:rPr>
-              <a:t>PHOTO SLOT 05-CARD-4 : HANDS HOLDING A SMALL CUP OF CARDAMOM COFFEE</a:t>
-            </a:r>
-            <a:endParaRPr lang="en-US" sz="900" dirty="0"/>
-          </a:p>
-        </p:txBody>
-      </p:sp>
-      <p:sp>
-        <p:nvSpPr>
-          <p:cNvPr id="28" name="Pillar number 04"/>
+          <p:cNvPr id="24" name="Pillar number 04"/>
           <p:cNvSpPr txBox="1"/>
           <p:nvPr/>
         </p:nvSpPr>
@@ -6790,7 +6517,7 @@
       </p:sp>
       <p:sp>
         <p:nvSpPr>
-          <p:cNvPr id="29" name="Pillar panel 04"/>
+          <p:cNvPr id="25" name="Pillar panel 04"/>
           <p:cNvSpPr/>
           <p:nvPr/>
         </p:nvSpPr>
@@ -6815,7 +6542,7 @@
       </p:sp>
       <p:sp>
         <p:nvSpPr>
-          <p:cNvPr id="30" name="Pillar title 04"/>
+          <p:cNvPr id="26" name="Pillar title 04"/>
           <p:cNvSpPr txBox="1"/>
           <p:nvPr/>
         </p:nvSpPr>
@@ -6857,7 +6584,7 @@
       </p:sp>
       <p:sp>
         <p:nvSpPr>
-          <p:cNvPr id="31" name="Pillar description 04"/>
+          <p:cNvPr id="27" name="Pillar description 04"/>
           <p:cNvSpPr txBox="1"/>
           <p:nvPr/>
         </p:nvSpPr>
@@ -6899,7 +6626,7 @@
       </p:sp>
       <p:sp>
         <p:nvSpPr>
-          <p:cNvPr id="32" name="Footer"/>
+          <p:cNvPr id="28" name="Footer"/>
           <p:cNvSpPr txBox="1"/>
           <p:nvPr/>
         </p:nvSpPr>
@@ -7008,45 +6735,30 @@
           </a:prstGeom>
         </p:spPr>
       </p:pic>
-      <p:sp>
-        <p:nvSpPr>
-          <p:cNvPr id="4" name="Photo slot label 06-pillar-1"/>
-          <p:cNvSpPr txBox="1"/>
-          <p:nvPr/>
-        </p:nvSpPr>
-        <p:spPr>
-          <a:xfrm>
-            <a:off x="228600" y="274320"/>
-            <a:ext cx="4419478" cy="548640"/>
-          </a:xfrm>
-          <a:prstGeom prst="rect">
-            <a:avLst/>
-          </a:prstGeom>
-          <a:noFill/>
-          <a:ln/>
-        </p:spPr>
-        <p:txBody>
-          <a:bodyPr wrap="square" lIns="0" tIns="0" rIns="0" bIns="0" rtlCol="0" anchor="t"/>
-          <a:lstStyle/>
-          <a:p>
-            <a:pPr algn="r" indent="0" marL="0">
-              <a:buNone/>
-            </a:pPr>
-            <a:r>
-              <a:rPr lang="en-US" sz="900" spc="150" kern="0" dirty="0">
-                <a:solidFill>
-                  <a:schemeClr val="accent1"/>
-                </a:solidFill>
-                <a:latin typeface="+mn-lt" pitchFamily="34" charset="0"/>
-                <a:ea typeface="+mn-lt" pitchFamily="34" charset="-122"/>
-                <a:cs typeface="+mn-lt" pitchFamily="34" charset="-120"/>
-              </a:rPr>
-              <a:t>PHOTO SLOT 06-PILLAR-1 : ROASTERY WITH BURLAP SACKS</a:t>
-            </a:r>
-            <a:endParaRPr lang="en-US" sz="900" dirty="0"/>
-          </a:p>
-        </p:txBody>
-      </p:sp>
+      <p:pic>
+        <p:nvPicPr>
+          <p:cNvPr id="4" name="Scrim scrim_left_fade_soft" descr="Gradient scrim">    </p:cNvPr>
+          <p:cNvPicPr>
+            <a:picLocks noChangeAspect="1"/>
+          </p:cNvPicPr>
+          <p:nvPr/>
+        </p:nvPicPr>
+        <p:blipFill>
+          <a:blip r:embed="rId3"/>
+          <a:stretch>
+            <a:fillRect/>
+          </a:stretch>
+        </p:blipFill>
+        <p:spPr>
+          <a:xfrm>
+            <a:off x="0" y="0"/>
+            <a:ext cx="4876678" cy="6858000"/>
+          </a:xfrm>
+          <a:prstGeom prst="rect">
+            <a:avLst/>
+          </a:prstGeom>
+        </p:spPr>
+      </p:pic>
       <p:sp>
         <p:nvSpPr>
           <p:cNvPr id="5" name="Eyebrow: Pillar 01"/>
@@ -8105,45 +7817,30 @@
           </a:prstGeom>
         </p:spPr>
       </p:pic>
-      <p:sp>
-        <p:nvSpPr>
-          <p:cNvPr id="4" name="Photo slot label 07-pillar-2"/>
-          <p:cNvSpPr txBox="1"/>
-          <p:nvPr/>
-        </p:nvSpPr>
-        <p:spPr>
-          <a:xfrm>
-            <a:off x="228600" y="274320"/>
-            <a:ext cx="4419478" cy="548640"/>
-          </a:xfrm>
-          <a:prstGeom prst="rect">
-            <a:avLst/>
-          </a:prstGeom>
-          <a:noFill/>
-          <a:ln/>
-        </p:spPr>
-        <p:txBody>
-          <a:bodyPr wrap="square" lIns="0" tIns="0" rIns="0" bIns="0" rtlCol="0" anchor="t"/>
-          <a:lstStyle/>
-          <a:p>
-            <a:pPr algn="r" indent="0" marL="0">
-              <a:buNone/>
-            </a:pPr>
-            <a:r>
-              <a:rPr lang="en-US" sz="900" spc="150" kern="0" dirty="0">
-                <a:solidFill>
-                  <a:schemeClr val="accent1"/>
-                </a:solidFill>
-                <a:latin typeface="+mn-lt" pitchFamily="34" charset="0"/>
-                <a:ea typeface="+mn-lt" pitchFamily="34" charset="-122"/>
-                <a:cs typeface="+mn-lt" pitchFamily="34" charset="-120"/>
-              </a:rPr>
-              <a:t>PHOTO SLOT 07-PILLAR-2 : CHEF PLATING AT A PASS</a:t>
-            </a:r>
-            <a:endParaRPr lang="en-US" sz="900" dirty="0"/>
-          </a:p>
-        </p:txBody>
-      </p:sp>
+      <p:pic>
+        <p:nvPicPr>
+          <p:cNvPr id="4" name="Scrim scrim_left_fade_soft" descr="Gradient scrim">    </p:cNvPr>
+          <p:cNvPicPr>
+            <a:picLocks noChangeAspect="1"/>
+          </p:cNvPicPr>
+          <p:nvPr/>
+        </p:nvPicPr>
+        <p:blipFill>
+          <a:blip r:embed="rId3"/>
+          <a:stretch>
+            <a:fillRect/>
+          </a:stretch>
+        </p:blipFill>
+        <p:spPr>
+          <a:xfrm>
+            <a:off x="0" y="0"/>
+            <a:ext cx="4876678" cy="6858000"/>
+          </a:xfrm>
+          <a:prstGeom prst="rect">
+            <a:avLst/>
+          </a:prstGeom>
+        </p:spPr>
+      </p:pic>
       <p:sp>
         <p:nvSpPr>
           <p:cNvPr id="5" name="Eyebrow: Pillar 02"/>
@@ -9202,45 +8899,30 @@
           </a:prstGeom>
         </p:spPr>
       </p:pic>
-      <p:sp>
-        <p:nvSpPr>
-          <p:cNvPr id="4" name="Photo slot label 08-pillar-3"/>
-          <p:cNvSpPr txBox="1"/>
-          <p:nvPr/>
-        </p:nvSpPr>
-        <p:spPr>
-          <a:xfrm>
-            <a:off x="228600" y="274320"/>
-            <a:ext cx="4419478" cy="548640"/>
-          </a:xfrm>
-          <a:prstGeom prst="rect">
-            <a:avLst/>
-          </a:prstGeom>
-          <a:noFill/>
-          <a:ln/>
-        </p:spPr>
-        <p:txBody>
-          <a:bodyPr wrap="square" lIns="0" tIns="0" rIns="0" bIns="0" rtlCol="0" anchor="t"/>
-          <a:lstStyle/>
-          <a:p>
-            <a:pPr algn="r" indent="0" marL="0">
-              <a:buNone/>
-            </a:pPr>
-            <a:r>
-              <a:rPr lang="en-US" sz="900" spc="150" kern="0" dirty="0">
-                <a:solidFill>
-                  <a:schemeClr val="accent1"/>
-                </a:solidFill>
-                <a:latin typeface="+mn-lt" pitchFamily="34" charset="0"/>
-                <a:ea typeface="+mn-lt" pitchFamily="34" charset="-122"/>
-                <a:cs typeface="+mn-lt" pitchFamily="34" charset="-120"/>
-              </a:rPr>
-              <a:t>PHOTO SLOT 08-PILLAR-3 : RESORT COURTYARD, LANTERNS AT DUSK</a:t>
-            </a:r>
-            <a:endParaRPr lang="en-US" sz="900" dirty="0"/>
-          </a:p>
-        </p:txBody>
-      </p:sp>
+      <p:pic>
+        <p:nvPicPr>
+          <p:cNvPr id="4" name="Scrim scrim_left_fade_soft" descr="Gradient scrim">    </p:cNvPr>
+          <p:cNvPicPr>
+            <a:picLocks noChangeAspect="1"/>
+          </p:cNvPicPr>
+          <p:nvPr/>
+        </p:nvPicPr>
+        <p:blipFill>
+          <a:blip r:embed="rId3"/>
+          <a:stretch>
+            <a:fillRect/>
+          </a:stretch>
+        </p:blipFill>
+        <p:spPr>
+          <a:xfrm>
+            <a:off x="0" y="0"/>
+            <a:ext cx="4876678" cy="6858000"/>
+          </a:xfrm>
+          <a:prstGeom prst="rect">
+            <a:avLst/>
+          </a:prstGeom>
+        </p:spPr>
+      </p:pic>
       <p:sp>
         <p:nvSpPr>
           <p:cNvPr id="5" name="Eyebrow: Pillar 03"/>
@@ -10299,45 +9981,30 @@
           </a:prstGeom>
         </p:spPr>
       </p:pic>
-      <p:sp>
-        <p:nvSpPr>
-          <p:cNvPr id="4" name="Photo slot label 09-pillar-4"/>
-          <p:cNvSpPr txBox="1"/>
-          <p:nvPr/>
-        </p:nvSpPr>
-        <p:spPr>
-          <a:xfrm>
-            <a:off x="228600" y="274320"/>
-            <a:ext cx="4419478" cy="548640"/>
-          </a:xfrm>
-          <a:prstGeom prst="rect">
-            <a:avLst/>
-          </a:prstGeom>
-          <a:noFill/>
-          <a:ln/>
-        </p:spPr>
-        <p:txBody>
-          <a:bodyPr wrap="square" lIns="0" tIns="0" rIns="0" bIns="0" rtlCol="0" anchor="t"/>
-          <a:lstStyle/>
-          <a:p>
-            <a:pPr algn="r" indent="0" marL="0">
-              <a:buNone/>
-            </a:pPr>
-            <a:r>
-              <a:rPr lang="en-US" sz="900" spc="150" kern="0" dirty="0">
-                <a:solidFill>
-                  <a:schemeClr val="accent1"/>
-                </a:solidFill>
-                <a:latin typeface="+mn-lt" pitchFamily="34" charset="0"/>
-                <a:ea typeface="+mn-lt" pitchFamily="34" charset="-122"/>
-                <a:cs typeface="+mn-lt" pitchFamily="34" charset="-120"/>
-              </a:rPr>
-              <a:t>PHOTO SLOT 09-PILLAR-4 : HERITAGE COFFEE HOUSE, BRASS AND WOOD</a:t>
-            </a:r>
-            <a:endParaRPr lang="en-US" sz="900" dirty="0"/>
-          </a:p>
-        </p:txBody>
-      </p:sp>
+      <p:pic>
+        <p:nvPicPr>
+          <p:cNvPr id="4" name="Scrim scrim_left_fade_soft" descr="Gradient scrim">    </p:cNvPr>
+          <p:cNvPicPr>
+            <a:picLocks noChangeAspect="1"/>
+          </p:cNvPicPr>
+          <p:nvPr/>
+        </p:nvPicPr>
+        <p:blipFill>
+          <a:blip r:embed="rId3"/>
+          <a:stretch>
+            <a:fillRect/>
+          </a:stretch>
+        </p:blipFill>
+        <p:spPr>
+          <a:xfrm>
+            <a:off x="0" y="0"/>
+            <a:ext cx="4876678" cy="6858000"/>
+          </a:xfrm>
+          <a:prstGeom prst="rect">
+            <a:avLst/>
+          </a:prstGeom>
+        </p:spPr>
+      </p:pic>
       <p:sp>
         <p:nvSpPr>
           <p:cNvPr id="5" name="Eyebrow: Pillar 04"/>
